--- a/CORDOVA/Project16_Presentazione.pptx
+++ b/CORDOVA/Project16_Presentazione.pptx
@@ -5,7 +5,7 @@
     <p:sldMasterId id="2147483648" r:id="rId1"/>
   </p:sldMasterIdLst>
   <p:notesMasterIdLst>
-    <p:notesMasterId r:id="rId23"/>
+    <p:notesMasterId r:id="rId24"/>
   </p:notesMasterIdLst>
   <p:sldIdLst>
     <p:sldId id="256" r:id="rId2"/>
@@ -28,7 +28,8 @@
     <p:sldId id="282" r:id="rId19"/>
     <p:sldId id="272" r:id="rId20"/>
     <p:sldId id="273" r:id="rId21"/>
-    <p:sldId id="275" r:id="rId22"/>
+    <p:sldId id="285" r:id="rId22"/>
+    <p:sldId id="275" r:id="rId23"/>
   </p:sldIdLst>
   <p:sldSz cx="12192000" cy="6858000"/>
   <p:notesSz cx="6858000" cy="12192000"/>
@@ -1887,7 +1888,7 @@
           <a:p>
             <a:fld id="{F7021451-1387-4CA6-816F-3879F97B5CBC}" type="slidenum">
               <a:rPr lang="en-US"/>
-              <a:t>21</a:t>
+              <a:t>22</a:t>
             </a:fld>
             <a:endParaRPr lang="en-US"/>
           </a:p>
@@ -10813,7 +10814,7 @@
         <p:spPr>
           <a:xfrm>
             <a:off x="548640" y="1920240"/>
-            <a:ext cx="6766560" cy="4023360"/>
+            <a:ext cx="11094415" cy="4023360"/>
           </a:xfrm>
           <a:prstGeom prst="rect">
             <a:avLst/>
@@ -10836,7 +10837,7 @@
               <a:buChar char="•"/>
             </a:pPr>
             <a:r>
-              <a:rPr lang="it-IT" sz="1550" noProof="0" dirty="0">
+              <a:rPr lang="it-IT" sz="1700" noProof="0" dirty="0">
                 <a:solidFill>
                   <a:srgbClr val="20303D"/>
                 </a:solidFill>
@@ -10847,7 +10848,7 @@
               <a:t>Nello scenario D la penalità sul </a:t>
             </a:r>
             <a:r>
-              <a:rPr lang="it-IT" sz="1550" noProof="0" dirty="0" err="1">
+              <a:rPr lang="it-IT" sz="1700" noProof="0" dirty="0" err="1">
                 <a:solidFill>
                   <a:srgbClr val="20303D"/>
                 </a:solidFill>
@@ -10858,7 +10859,7 @@
               <a:t>curtailment</a:t>
             </a:r>
             <a:r>
-              <a:rPr lang="it-IT" sz="1550" noProof="0" dirty="0">
+              <a:rPr lang="it-IT" sz="1700" noProof="0" dirty="0">
                 <a:solidFill>
                   <a:srgbClr val="20303D"/>
                 </a:solidFill>
@@ -10882,7 +10883,7 @@
               <a:buChar char="•"/>
             </a:pPr>
             <a:r>
-              <a:rPr lang="it-IT" sz="1550" noProof="0" dirty="0">
+              <a:rPr lang="it-IT" sz="1700" noProof="0" dirty="0">
                 <a:solidFill>
                   <a:srgbClr val="20303D"/>
                 </a:solidFill>
@@ -10893,7 +10894,7 @@
               <a:t>Invece il </a:t>
             </a:r>
             <a:r>
-              <a:rPr lang="it-IT" sz="1550" noProof="0" dirty="0" err="1">
+              <a:rPr lang="it-IT" sz="1700" noProof="0" dirty="0" err="1">
                 <a:solidFill>
                   <a:srgbClr val="20303D"/>
                 </a:solidFill>
@@ -10904,7 +10905,7 @@
               <a:t>curtailment</a:t>
             </a:r>
             <a:r>
-              <a:rPr lang="it-IT" sz="1550" noProof="0" dirty="0">
+              <a:rPr lang="it-IT" sz="1700" noProof="0" dirty="0">
                 <a:solidFill>
                   <a:srgbClr val="20303D"/>
                 </a:solidFill>
@@ -10928,7 +10929,7 @@
               <a:buChar char="•"/>
             </a:pPr>
             <a:r>
-              <a:rPr lang="it-IT" sz="1550" noProof="0" dirty="0">
+              <a:rPr lang="it-IT" sz="1700" noProof="0" dirty="0">
                 <a:solidFill>
                   <a:srgbClr val="20303D"/>
                 </a:solidFill>
@@ -10939,312 +10940,6 @@
               <a:t>Il motivo: su base annuale batteria, idrogeno ed export in rete offrono sempre abbastanza spazio per assorbire la produzione rinnovabile, anche quando gli accumuli partono già pieni.</a:t>
             </a:r>
             <a:endParaRPr lang="it-IT" sz="1550" noProof="0" dirty="0"/>
-          </a:p>
-        </p:txBody>
-      </p:sp>
-      <p:sp>
-        <p:nvSpPr>
-          <p:cNvPr id="2" name="Shape 2">
-            <a:extLst>
-              <a:ext uri="{FF2B5EF4-FFF2-40B4-BE49-F238E27FC236}">
-                <a16:creationId xmlns:a16="http://schemas.microsoft.com/office/drawing/2014/main" id="{30ECC30A-9953-9242-5D8C-659A3C8F137D}"/>
-              </a:ext>
-            </a:extLst>
-          </p:cNvPr>
-          <p:cNvSpPr/>
-          <p:nvPr/>
-        </p:nvSpPr>
-        <p:spPr>
-          <a:xfrm>
-            <a:off x="9052560" y="1828800"/>
-            <a:ext cx="2590495" cy="4206240"/>
-          </a:xfrm>
-          <a:prstGeom prst="roundRect">
-            <a:avLst>
-              <a:gd name="adj" fmla="val 2824"/>
-            </a:avLst>
-          </a:prstGeom>
-          <a:solidFill>
-            <a:srgbClr val="0B3D59"/>
-          </a:solidFill>
-          <a:ln w="12700">
-            <a:solidFill>
-              <a:srgbClr val="0B3D59"/>
-            </a:solidFill>
-            <a:prstDash val="solid"/>
-          </a:ln>
-        </p:spPr>
-        <p:txBody>
-          <a:bodyPr/>
-          <a:lstStyle/>
-          <a:p>
-            <a:endParaRPr lang="it-IT" noProof="0" dirty="0"/>
-          </a:p>
-        </p:txBody>
-      </p:sp>
-      <p:sp>
-        <p:nvSpPr>
-          <p:cNvPr id="5" name="Text 3">
-            <a:extLst>
-              <a:ext uri="{FF2B5EF4-FFF2-40B4-BE49-F238E27FC236}">
-                <a16:creationId xmlns:a16="http://schemas.microsoft.com/office/drawing/2014/main" id="{83F29548-570A-305B-FFCA-4E7C426C25DD}"/>
-              </a:ext>
-            </a:extLst>
-          </p:cNvPr>
-          <p:cNvSpPr/>
-          <p:nvPr/>
-        </p:nvSpPr>
-        <p:spPr>
-          <a:xfrm>
-            <a:off x="9281160" y="2148840"/>
-            <a:ext cx="2133295" cy="731520"/>
-          </a:xfrm>
-          <a:prstGeom prst="rect">
-            <a:avLst/>
-          </a:prstGeom>
-          <a:noFill/>
-          <a:ln/>
-        </p:spPr>
-        <p:txBody>
-          <a:bodyPr wrap="square" lIns="0" tIns="0" rIns="0" bIns="0" rtlCol="0" anchor="ctr"/>
-          <a:lstStyle/>
-          <a:p>
-            <a:pPr marL="0" indent="0" algn="ctr">
-              <a:buNone/>
-            </a:pPr>
-            <a:r>
-              <a:rPr lang="it-IT" sz="3400" b="1" noProof="0" dirty="0">
-                <a:solidFill>
-                  <a:srgbClr val="FFB100"/>
-                </a:solidFill>
-                <a:latin typeface="Cambria" pitchFamily="34" charset="0"/>
-                <a:ea typeface="Cambria" pitchFamily="34" charset="-122"/>
-                <a:cs typeface="Cambria" pitchFamily="34" charset="-120"/>
-              </a:rPr>
-              <a:t>0 MWh</a:t>
-            </a:r>
-            <a:endParaRPr lang="it-IT" sz="3400" noProof="0" dirty="0"/>
-          </a:p>
-        </p:txBody>
-      </p:sp>
-      <p:sp>
-        <p:nvSpPr>
-          <p:cNvPr id="6" name="Text 4">
-            <a:extLst>
-              <a:ext uri="{FF2B5EF4-FFF2-40B4-BE49-F238E27FC236}">
-                <a16:creationId xmlns:a16="http://schemas.microsoft.com/office/drawing/2014/main" id="{B8BD0F6F-9736-9482-E0AC-1E6740DB2D05}"/>
-              </a:ext>
-            </a:extLst>
-          </p:cNvPr>
-          <p:cNvSpPr/>
-          <p:nvPr/>
-        </p:nvSpPr>
-        <p:spPr>
-          <a:xfrm>
-            <a:off x="9281160" y="2926080"/>
-            <a:ext cx="2133295" cy="822960"/>
-          </a:xfrm>
-          <a:prstGeom prst="rect">
-            <a:avLst/>
-          </a:prstGeom>
-          <a:noFill/>
-          <a:ln/>
-        </p:spPr>
-        <p:txBody>
-          <a:bodyPr wrap="square" lIns="0" tIns="0" rIns="0" bIns="0" rtlCol="0" anchor="ctr"/>
-          <a:lstStyle/>
-          <a:p>
-            <a:pPr marL="0" indent="0" algn="ctr">
-              <a:lnSpc>
-                <a:spcPct val="120000"/>
-              </a:lnSpc>
-              <a:buNone/>
-            </a:pPr>
-            <a:r>
-              <a:rPr lang="it-IT" sz="1250" noProof="0" dirty="0" err="1">
-                <a:solidFill>
-                  <a:srgbClr val="FFFFFF"/>
-                </a:solidFill>
-                <a:latin typeface="Calibri" pitchFamily="34" charset="0"/>
-                <a:ea typeface="Calibri" pitchFamily="34" charset="-122"/>
-                <a:cs typeface="Calibri" pitchFamily="34" charset="-120"/>
-              </a:rPr>
-              <a:t>curtailment</a:t>
-            </a:r>
-            <a:r>
-              <a:rPr lang="it-IT" sz="1250" noProof="0" dirty="0">
-                <a:solidFill>
-                  <a:srgbClr val="FFFFFF"/>
-                </a:solidFill>
-                <a:latin typeface="Calibri" pitchFamily="34" charset="0"/>
-                <a:ea typeface="Calibri" pitchFamily="34" charset="-122"/>
-                <a:cs typeface="Calibri" pitchFamily="34" charset="-120"/>
-              </a:rPr>
-              <a:t> in TUTTI e 4 gli scenari, con entrambi i solver</a:t>
-            </a:r>
-            <a:endParaRPr lang="it-IT" sz="1250" noProof="0" dirty="0"/>
-          </a:p>
-        </p:txBody>
-      </p:sp>
-      <p:sp>
-        <p:nvSpPr>
-          <p:cNvPr id="7" name="Shape 5">
-            <a:extLst>
-              <a:ext uri="{FF2B5EF4-FFF2-40B4-BE49-F238E27FC236}">
-                <a16:creationId xmlns:a16="http://schemas.microsoft.com/office/drawing/2014/main" id="{4D3BC0C2-1B0A-5A6A-401D-E2D58BCFC2A3}"/>
-              </a:ext>
-            </a:extLst>
-          </p:cNvPr>
-          <p:cNvSpPr/>
-          <p:nvPr/>
-        </p:nvSpPr>
-        <p:spPr>
-          <a:xfrm>
-            <a:off x="9418320" y="3886200"/>
-            <a:ext cx="1858975" cy="914"/>
-          </a:xfrm>
-          <a:prstGeom prst="line">
-            <a:avLst/>
-          </a:prstGeom>
-          <a:noFill/>
-          <a:ln w="12700">
-            <a:solidFill>
-              <a:srgbClr val="2E5975"/>
-            </a:solidFill>
-            <a:prstDash val="solid"/>
-          </a:ln>
-        </p:spPr>
-        <p:txBody>
-          <a:bodyPr/>
-          <a:lstStyle/>
-          <a:p>
-            <a:endParaRPr lang="it-IT" noProof="0" dirty="0"/>
-          </a:p>
-        </p:txBody>
-      </p:sp>
-      <p:sp>
-        <p:nvSpPr>
-          <p:cNvPr id="8" name="Text 6">
-            <a:extLst>
-              <a:ext uri="{FF2B5EF4-FFF2-40B4-BE49-F238E27FC236}">
-                <a16:creationId xmlns:a16="http://schemas.microsoft.com/office/drawing/2014/main" id="{37E10349-5AB9-2105-5A4A-2149C18D9A9A}"/>
-              </a:ext>
-            </a:extLst>
-          </p:cNvPr>
-          <p:cNvSpPr/>
-          <p:nvPr/>
-        </p:nvSpPr>
-        <p:spPr>
-          <a:xfrm>
-            <a:off x="9281160" y="4069080"/>
-            <a:ext cx="2133295" cy="548640"/>
-          </a:xfrm>
-          <a:prstGeom prst="rect">
-            <a:avLst/>
-          </a:prstGeom>
-          <a:noFill/>
-          <a:ln/>
-        </p:spPr>
-        <p:txBody>
-          <a:bodyPr wrap="square" lIns="0" tIns="0" rIns="0" bIns="0" rtlCol="0" anchor="ctr"/>
-          <a:lstStyle/>
-          <a:p>
-            <a:pPr marL="0" indent="0" algn="ctr">
-              <a:buNone/>
-            </a:pPr>
-            <a:r>
-              <a:rPr lang="it-IT" sz="2200" b="1" noProof="0" dirty="0">
-                <a:solidFill>
-                  <a:srgbClr val="FFFFFF"/>
-                </a:solidFill>
-                <a:latin typeface="Cambria" pitchFamily="34" charset="0"/>
-                <a:ea typeface="Cambria" pitchFamily="34" charset="-122"/>
-                <a:cs typeface="Cambria" pitchFamily="34" charset="-120"/>
-              </a:rPr>
-              <a:t>&lt; 0,01%</a:t>
-            </a:r>
-            <a:endParaRPr lang="it-IT" sz="2200" noProof="0" dirty="0"/>
-          </a:p>
-        </p:txBody>
-      </p:sp>
-      <p:sp>
-        <p:nvSpPr>
-          <p:cNvPr id="9" name="Text 7">
-            <a:extLst>
-              <a:ext uri="{FF2B5EF4-FFF2-40B4-BE49-F238E27FC236}">
-                <a16:creationId xmlns:a16="http://schemas.microsoft.com/office/drawing/2014/main" id="{9AF8122B-41A5-27AA-5DE1-5DED93A3A09D}"/>
-              </a:ext>
-            </a:extLst>
-          </p:cNvPr>
-          <p:cNvSpPr/>
-          <p:nvPr/>
-        </p:nvSpPr>
-        <p:spPr>
-          <a:xfrm>
-            <a:off x="9281160" y="4617720"/>
-            <a:ext cx="2133295" cy="640080"/>
-          </a:xfrm>
-          <a:prstGeom prst="rect">
-            <a:avLst/>
-          </a:prstGeom>
-          <a:noFill/>
-          <a:ln/>
-        </p:spPr>
-        <p:txBody>
-          <a:bodyPr wrap="square" lIns="0" tIns="0" rIns="0" bIns="0" rtlCol="0" anchor="ctr"/>
-          <a:lstStyle/>
-          <a:p>
-            <a:pPr marL="0" indent="0" algn="ctr">
-              <a:lnSpc>
-                <a:spcPct val="115000"/>
-              </a:lnSpc>
-              <a:buNone/>
-            </a:pPr>
-            <a:r>
-              <a:rPr lang="it-IT" sz="1200" noProof="0" dirty="0">
-                <a:solidFill>
-                  <a:srgbClr val="CADCE8"/>
-                </a:solidFill>
-                <a:latin typeface="Calibri" pitchFamily="34" charset="0"/>
-                <a:ea typeface="Calibri" pitchFamily="34" charset="-122"/>
-                <a:cs typeface="Calibri" pitchFamily="34" charset="-120"/>
-              </a:rPr>
-              <a:t>differenza di costo tra </a:t>
-            </a:r>
-            <a:r>
-              <a:rPr lang="it-IT" sz="1200" noProof="0" dirty="0" err="1">
-                <a:solidFill>
-                  <a:srgbClr val="CADCE8"/>
-                </a:solidFill>
-                <a:latin typeface="Calibri" pitchFamily="34" charset="0"/>
-                <a:ea typeface="Calibri" pitchFamily="34" charset="-122"/>
-                <a:cs typeface="Calibri" pitchFamily="34" charset="-120"/>
-              </a:rPr>
-              <a:t>Gurobi</a:t>
-            </a:r>
-            <a:r>
-              <a:rPr lang="it-IT" sz="1200" noProof="0" dirty="0">
-                <a:solidFill>
-                  <a:srgbClr val="CADCE8"/>
-                </a:solidFill>
-                <a:latin typeface="Calibri" pitchFamily="34" charset="0"/>
-                <a:ea typeface="Calibri" pitchFamily="34" charset="-122"/>
-                <a:cs typeface="Calibri" pitchFamily="34" charset="-120"/>
-              </a:rPr>
-              <a:t> e </a:t>
-            </a:r>
-            <a:r>
-              <a:rPr lang="it-IT" sz="1200" noProof="0" dirty="0" err="1">
-                <a:solidFill>
-                  <a:srgbClr val="CADCE8"/>
-                </a:solidFill>
-                <a:latin typeface="Calibri" pitchFamily="34" charset="0"/>
-                <a:ea typeface="Calibri" pitchFamily="34" charset="-122"/>
-                <a:cs typeface="Calibri" pitchFamily="34" charset="-120"/>
-              </a:rPr>
-              <a:t>HiGHS</a:t>
-            </a:r>
-            <a:endParaRPr lang="it-IT" sz="1200" noProof="0" dirty="0"/>
           </a:p>
         </p:txBody>
       </p:sp>
@@ -11257,6 +10952,826 @@
 </file>
 
 <file path=ppt/slides/slide21.xml><?xml version="1.0" encoding="utf-8"?>
+<p:sld xmlns:a="http://schemas.openxmlformats.org/drawingml/2006/main" xmlns:r="http://schemas.openxmlformats.org/officeDocument/2006/relationships" xmlns:p="http://schemas.openxmlformats.org/presentationml/2006/main">
+  <p:cSld>
+    <p:bg>
+      <p:bgPr>
+        <a:solidFill>
+          <a:srgbClr val="FFFFFF"/>
+        </a:solidFill>
+        <a:effectLst/>
+      </p:bgPr>
+    </p:bg>
+    <p:spTree>
+      <p:nvGrpSpPr>
+        <p:cNvPr id="1" name=""/>
+        <p:cNvGrpSpPr/>
+        <p:nvPr/>
+      </p:nvGrpSpPr>
+      <p:grpSpPr>
+        <a:xfrm>
+          <a:off x="0" y="0"/>
+          <a:ext cx="0" cy="0"/>
+          <a:chOff x="0" y="0"/>
+          <a:chExt cx="0" cy="0"/>
+        </a:xfrm>
+      </p:grpSpPr>
+      <p:sp>
+        <p:nvSpPr>
+          <p:cNvPr id="3" name="Text 1"/>
+          <p:cNvSpPr/>
+          <p:nvPr/>
+        </p:nvSpPr>
+        <p:spPr>
+          <a:xfrm>
+            <a:off x="548640" y="713232"/>
+            <a:ext cx="11094415" cy="777240"/>
+          </a:xfrm>
+          <a:prstGeom prst="rect">
+            <a:avLst/>
+          </a:prstGeom>
+          <a:noFill/>
+          <a:ln/>
+        </p:spPr>
+        <p:txBody>
+          <a:bodyPr wrap="square" lIns="0" tIns="0" rIns="0" bIns="0" rtlCol="0" anchor="ctr"/>
+          <a:lstStyle/>
+          <a:p>
+            <a:pPr marL="0" indent="0">
+              <a:buNone/>
+            </a:pPr>
+            <a:r>
+              <a:rPr lang="it-IT" sz="3000" b="1" noProof="0" dirty="0">
+                <a:solidFill>
+                  <a:srgbClr val="0B3D59"/>
+                </a:solidFill>
+                <a:latin typeface="Cambria" pitchFamily="34" charset="0"/>
+                <a:ea typeface="Cambria" pitchFamily="34" charset="-122"/>
+                <a:cs typeface="Cambria" pitchFamily="34" charset="-120"/>
+              </a:rPr>
+              <a:t>Riepilogo, componente per componente</a:t>
+            </a:r>
+            <a:endParaRPr lang="it-IT" sz="3000" noProof="0" dirty="0"/>
+          </a:p>
+        </p:txBody>
+      </p:sp>
+      <p:sp>
+        <p:nvSpPr>
+          <p:cNvPr id="4" name="Shape 2"/>
+          <p:cNvSpPr/>
+          <p:nvPr/>
+        </p:nvSpPr>
+        <p:spPr>
+          <a:xfrm>
+            <a:off x="548639" y="1730000"/>
+            <a:ext cx="11094415" cy="780000"/>
+          </a:xfrm>
+          <a:prstGeom prst="roundRect">
+            <a:avLst>
+              <a:gd name="adj" fmla="val 6557"/>
+            </a:avLst>
+          </a:prstGeom>
+          <a:solidFill>
+            <a:srgbClr val="F1F5F8"/>
+          </a:solidFill>
+          <a:ln w="12700">
+            <a:solidFill>
+              <a:srgbClr val="DCE6EC"/>
+            </a:solidFill>
+            <a:prstDash val="solid"/>
+          </a:ln>
+          <a:effectLst>
+            <a:outerShdw blurRad="76200" dist="25400" dir="5400000" algn="bl" rotWithShape="0">
+              <a:srgbClr val="9AA7AF">
+                <a:alpha val="25000"/>
+              </a:srgbClr>
+            </a:outerShdw>
+          </a:effectLst>
+        </p:spPr>
+        <p:txBody>
+          <a:bodyPr/>
+          <a:lstStyle/>
+          <a:p>
+            <a:endParaRPr lang="it-IT" noProof="0" dirty="0"/>
+          </a:p>
+        </p:txBody>
+      </p:sp>
+      <p:sp>
+        <p:nvSpPr>
+          <p:cNvPr id="5" name="Shape 3"/>
+          <p:cNvSpPr/>
+          <p:nvPr/>
+        </p:nvSpPr>
+        <p:spPr>
+          <a:xfrm>
+            <a:off x="548640" y="1730000"/>
+            <a:ext cx="128016" cy="780000"/>
+          </a:xfrm>
+          <a:prstGeom prst="roundRect">
+            <a:avLst/>
+          </a:prstGeom>
+          <a:solidFill>
+            <a:srgbClr val="2E8B57"/>
+          </a:solidFill>
+          <a:ln/>
+        </p:spPr>
+        <p:txBody>
+          <a:bodyPr/>
+          <a:lstStyle/>
+          <a:p>
+            <a:endParaRPr lang="it-IT" noProof="0" dirty="0"/>
+          </a:p>
+        </p:txBody>
+      </p:sp>
+      <p:sp>
+        <p:nvSpPr>
+          <p:cNvPr id="6" name="Text 4"/>
+          <p:cNvSpPr/>
+          <p:nvPr/>
+        </p:nvSpPr>
+        <p:spPr>
+          <a:xfrm>
+            <a:off x="914400" y="1790000"/>
+            <a:ext cx="3291840" cy="660000"/>
+          </a:xfrm>
+          <a:prstGeom prst="rect">
+            <a:avLst/>
+          </a:prstGeom>
+          <a:noFill/>
+          <a:ln/>
+        </p:spPr>
+        <p:txBody>
+          <a:bodyPr wrap="square" lIns="0" tIns="0" rIns="0" bIns="0" rtlCol="0" anchor="ctr"/>
+          <a:lstStyle/>
+          <a:p>
+            <a:pPr marL="0" indent="0">
+              <a:lnSpc>
+                <a:spcPct val="110000"/>
+              </a:lnSpc>
+              <a:buNone/>
+            </a:pPr>
+            <a:r>
+              <a:rPr lang="it-IT" sz="1500" b="1" noProof="0" dirty="0">
+                <a:solidFill>
+                  <a:srgbClr val="0B3D59"/>
+                </a:solidFill>
+                <a:latin typeface="Calibri" pitchFamily="34" charset="0"/>
+                <a:ea typeface="Calibri" pitchFamily="34" charset="-122"/>
+                <a:cs typeface="Calibri" pitchFamily="34" charset="-120"/>
+              </a:rPr>
+              <a:t>RINNOVABILI</a:t>
+            </a:r>
+            <a:endParaRPr lang="it-IT" sz="1500" noProof="0" dirty="0"/>
+          </a:p>
+        </p:txBody>
+      </p:sp>
+      <p:sp>
+        <p:nvSpPr>
+          <p:cNvPr id="7" name="Text 5"/>
+          <p:cNvSpPr/>
+          <p:nvPr/>
+        </p:nvSpPr>
+        <p:spPr>
+          <a:xfrm>
+            <a:off x="4389120" y="1790000"/>
+            <a:ext cx="6979615" cy="660000"/>
+          </a:xfrm>
+          <a:prstGeom prst="rect">
+            <a:avLst/>
+          </a:prstGeom>
+          <a:noFill/>
+          <a:ln/>
+        </p:spPr>
+        <p:txBody>
+          <a:bodyPr wrap="square" lIns="0" tIns="0" rIns="0" bIns="0" rtlCol="0" anchor="ctr"/>
+          <a:lstStyle/>
+          <a:p>
+            <a:pPr>
+              <a:lnSpc>
+                <a:spcPct val="120000"/>
+              </a:lnSpc>
+            </a:pPr>
+            <a:r>
+              <a:rPr lang="it-IT" sz="1200" dirty="0">
+                <a:solidFill>
+                  <a:srgbClr val="20303D"/>
+                </a:solidFill>
+                <a:latin typeface="Courier New" pitchFamily="34" charset="0"/>
+                <a:cs typeface="Courier New" pitchFamily="34" charset="-120"/>
+              </a:rPr>
+              <a:t>Mai sprecate: il curtailment resta sempre a zero, in ogni scenario testato.</a:t>
+            </a:r>
+          </a:p>
+        </p:txBody>
+      </p:sp>
+      <p:sp>
+        <p:nvSpPr>
+          <p:cNvPr id="12" name="Shape 10"/>
+          <p:cNvSpPr/>
+          <p:nvPr/>
+        </p:nvSpPr>
+        <p:spPr>
+          <a:xfrm>
+            <a:off x="548640" y="2640000"/>
+            <a:ext cx="11094415" cy="780000"/>
+          </a:xfrm>
+          <a:prstGeom prst="roundRect">
+            <a:avLst>
+              <a:gd name="adj" fmla="val 6557"/>
+            </a:avLst>
+          </a:prstGeom>
+          <a:solidFill>
+            <a:srgbClr val="F1F5F8"/>
+          </a:solidFill>
+          <a:ln w="12700">
+            <a:solidFill>
+              <a:srgbClr val="DCE6EC"/>
+            </a:solidFill>
+            <a:prstDash val="solid"/>
+          </a:ln>
+          <a:effectLst>
+            <a:outerShdw blurRad="76200" dist="25400" dir="5400000" algn="bl" rotWithShape="0">
+              <a:srgbClr val="9AA7AF">
+                <a:alpha val="25000"/>
+              </a:srgbClr>
+            </a:outerShdw>
+          </a:effectLst>
+        </p:spPr>
+        <p:txBody>
+          <a:bodyPr/>
+          <a:lstStyle/>
+          <a:p>
+            <a:endParaRPr lang="it-IT" noProof="0" dirty="0"/>
+          </a:p>
+        </p:txBody>
+      </p:sp>
+      <p:sp>
+        <p:nvSpPr>
+          <p:cNvPr id="13" name="Shape 11"/>
+          <p:cNvSpPr/>
+          <p:nvPr/>
+        </p:nvSpPr>
+        <p:spPr>
+          <a:xfrm>
+            <a:off x="548640" y="2640000"/>
+            <a:ext cx="128016" cy="780000"/>
+          </a:xfrm>
+          <a:prstGeom prst="roundRect">
+            <a:avLst/>
+          </a:prstGeom>
+          <a:solidFill>
+            <a:srgbClr val="8A5CBF"/>
+          </a:solidFill>
+          <a:ln/>
+        </p:spPr>
+        <p:txBody>
+          <a:bodyPr/>
+          <a:lstStyle/>
+          <a:p>
+            <a:endParaRPr lang="it-IT" noProof="0" dirty="0"/>
+          </a:p>
+        </p:txBody>
+      </p:sp>
+      <p:sp>
+        <p:nvSpPr>
+          <p:cNvPr id="14" name="Text 12"/>
+          <p:cNvSpPr/>
+          <p:nvPr/>
+        </p:nvSpPr>
+        <p:spPr>
+          <a:xfrm>
+            <a:off x="914400" y="2700000"/>
+            <a:ext cx="3291840" cy="660000"/>
+          </a:xfrm>
+          <a:prstGeom prst="rect">
+            <a:avLst/>
+          </a:prstGeom>
+          <a:noFill/>
+          <a:ln/>
+        </p:spPr>
+        <p:txBody>
+          <a:bodyPr wrap="square" lIns="0" tIns="0" rIns="0" bIns="0" rtlCol="0" anchor="ctr"/>
+          <a:lstStyle/>
+          <a:p>
+            <a:pPr marL="0" indent="0">
+              <a:lnSpc>
+                <a:spcPct val="110000"/>
+              </a:lnSpc>
+              <a:buNone/>
+            </a:pPr>
+            <a:r>
+              <a:rPr lang="it-IT" sz="1500" b="1" noProof="0" dirty="0">
+                <a:solidFill>
+                  <a:srgbClr val="0B3D59"/>
+                </a:solidFill>
+                <a:latin typeface="Calibri" pitchFamily="34" charset="0"/>
+                <a:ea typeface="Calibri" pitchFamily="34" charset="-122"/>
+                <a:cs typeface="Calibri" pitchFamily="34" charset="-120"/>
+              </a:rPr>
+              <a:t>BATTERIA</a:t>
+            </a:r>
+            <a:endParaRPr lang="it-IT" sz="1500" noProof="0" dirty="0"/>
+          </a:p>
+        </p:txBody>
+      </p:sp>
+      <p:sp>
+        <p:nvSpPr>
+          <p:cNvPr id="15" name="Text 13"/>
+          <p:cNvSpPr/>
+          <p:nvPr/>
+        </p:nvSpPr>
+        <p:spPr>
+          <a:xfrm>
+            <a:off x="4389120" y="2700000"/>
+            <a:ext cx="6979615" cy="660000"/>
+          </a:xfrm>
+          <a:prstGeom prst="rect">
+            <a:avLst/>
+          </a:prstGeom>
+          <a:noFill/>
+          <a:ln/>
+        </p:spPr>
+        <p:txBody>
+          <a:bodyPr wrap="square" lIns="0" tIns="0" rIns="0" bIns="0" rtlCol="0" anchor="ctr"/>
+          <a:lstStyle/>
+          <a:p>
+            <a:pPr marL="0" indent="0">
+              <a:lnSpc>
+                <a:spcPct val="120000"/>
+              </a:lnSpc>
+              <a:buNone/>
+            </a:pPr>
+            <a:r>
+              <a:rPr lang="it-IT" sz="1200" noProof="0" dirty="0" err="1">
+                <a:solidFill>
+                  <a:srgbClr val="20303D"/>
+                </a:solidFill>
+                <a:latin typeface="Courier New" pitchFamily="34" charset="0"/>
+                <a:ea typeface="Courier New" pitchFamily="34" charset="-122"/>
+                <a:cs typeface="Courier New" pitchFamily="34" charset="-120"/>
+              </a:rPr>
+              <a:t>Solo un cuscinetto: resta quasi sempre attaccata ai limiti 10% e 90%.</a:t>
+            </a:r>
+            <a:endParaRPr lang="it-IT" sz="1200" noProof="0" dirty="0"/>
+          </a:p>
+        </p:txBody>
+      </p:sp>
+      <p:sp>
+        <p:nvSpPr>
+          <p:cNvPr id="2" name="Shape 2"/>
+          <p:cNvSpPr/>
+          <p:nvPr/>
+        </p:nvSpPr>
+        <p:spPr>
+          <a:xfrm>
+            <a:off x="548639" y="3550000"/>
+            <a:ext cx="11094415" cy="780000"/>
+          </a:xfrm>
+          <a:prstGeom prst="roundRect">
+            <a:avLst>
+              <a:gd name="adj" fmla="val 6557"/>
+            </a:avLst>
+          </a:prstGeom>
+          <a:solidFill>
+            <a:srgbClr val="F1F5F8"/>
+          </a:solidFill>
+          <a:ln w="12700">
+            <a:solidFill>
+              <a:srgbClr val="DCE6EC"/>
+            </a:solidFill>
+            <a:prstDash val="solid"/>
+          </a:ln>
+          <a:effectLst>
+            <a:outerShdw blurRad="76200" dist="25400" dir="5400000" algn="bl" rotWithShape="0">
+              <a:srgbClr val="9AA7AF">
+                <a:alpha val="25000"/>
+              </a:srgbClr>
+            </a:outerShdw>
+          </a:effectLst>
+        </p:spPr>
+        <p:txBody>
+          <a:bodyPr/>
+          <a:lstStyle/>
+          <a:p>
+            <a:endParaRPr lang="it-IT" noProof="0" dirty="0"/>
+          </a:p>
+        </p:txBody>
+      </p:sp>
+      <p:sp>
+        <p:nvSpPr>
+          <p:cNvPr id="8" name="Shape 3"/>
+          <p:cNvSpPr/>
+          <p:nvPr/>
+        </p:nvSpPr>
+        <p:spPr>
+          <a:xfrm>
+            <a:off x="548640" y="3550000"/>
+            <a:ext cx="128016" cy="780000"/>
+          </a:xfrm>
+          <a:prstGeom prst="roundRect">
+            <a:avLst/>
+          </a:prstGeom>
+          <a:solidFill>
+            <a:srgbClr val="C0433A"/>
+          </a:solidFill>
+          <a:ln/>
+        </p:spPr>
+        <p:txBody>
+          <a:bodyPr/>
+          <a:lstStyle/>
+          <a:p>
+            <a:endParaRPr lang="it-IT" noProof="0" dirty="0"/>
+          </a:p>
+        </p:txBody>
+      </p:sp>
+      <p:sp>
+        <p:nvSpPr>
+          <p:cNvPr id="9" name="Text 4"/>
+          <p:cNvSpPr/>
+          <p:nvPr/>
+        </p:nvSpPr>
+        <p:spPr>
+          <a:xfrm>
+            <a:off x="914400" y="3610000"/>
+            <a:ext cx="3291840" cy="660000"/>
+          </a:xfrm>
+          <a:prstGeom prst="rect">
+            <a:avLst/>
+          </a:prstGeom>
+          <a:noFill/>
+          <a:ln/>
+        </p:spPr>
+        <p:txBody>
+          <a:bodyPr wrap="square" lIns="0" tIns="0" rIns="0" bIns="0" rtlCol="0" anchor="ctr"/>
+          <a:lstStyle/>
+          <a:p>
+            <a:pPr marL="0" indent="0">
+              <a:lnSpc>
+                <a:spcPct val="110000"/>
+              </a:lnSpc>
+              <a:buNone/>
+            </a:pPr>
+            <a:r>
+              <a:rPr lang="it-IT" sz="1500" b="1" noProof="0" dirty="0">
+                <a:solidFill>
+                  <a:srgbClr val="0B3D59"/>
+                </a:solidFill>
+                <a:latin typeface="Calibri" pitchFamily="34" charset="0"/>
+                <a:ea typeface="Calibri" pitchFamily="34" charset="-122"/>
+                <a:cs typeface="Calibri" pitchFamily="34" charset="-120"/>
+              </a:rPr>
+              <a:t>IDROGENO</a:t>
+            </a:r>
+            <a:endParaRPr lang="it-IT" sz="1500" noProof="0" dirty="0"/>
+          </a:p>
+        </p:txBody>
+      </p:sp>
+      <p:sp>
+        <p:nvSpPr>
+          <p:cNvPr id="10" name="Text 5"/>
+          <p:cNvSpPr/>
+          <p:nvPr/>
+        </p:nvSpPr>
+        <p:spPr>
+          <a:xfrm>
+            <a:off x="4389120" y="3610000"/>
+            <a:ext cx="6979615" cy="660000"/>
+          </a:xfrm>
+          <a:prstGeom prst="rect">
+            <a:avLst/>
+          </a:prstGeom>
+          <a:noFill/>
+          <a:ln/>
+        </p:spPr>
+        <p:txBody>
+          <a:bodyPr wrap="square" lIns="0" tIns="0" rIns="0" bIns="0" rtlCol="0" anchor="ctr"/>
+          <a:lstStyle/>
+          <a:p>
+            <a:pPr>
+              <a:lnSpc>
+                <a:spcPct val="120000"/>
+              </a:lnSpc>
+            </a:pPr>
+            <a:r>
+              <a:rPr lang="it-IT" sz="1200" dirty="0">
+                <a:solidFill>
+                  <a:srgbClr val="20303D"/>
+                </a:solidFill>
+                <a:latin typeface="Courier New" pitchFamily="34" charset="0"/>
+                <a:cs typeface="Courier New" pitchFamily="34" charset="-120"/>
+              </a:rPr>
+              <a:t>Quasi sempre ferma: il rendimento troppo basso non la rende conveniente.</a:t>
+            </a:r>
+          </a:p>
+        </p:txBody>
+      </p:sp>
+      <p:sp>
+        <p:nvSpPr>
+          <p:cNvPr id="11" name="Shape 2"/>
+          <p:cNvSpPr/>
+          <p:nvPr/>
+        </p:nvSpPr>
+        <p:spPr>
+          <a:xfrm>
+            <a:off x="548639" y="4460000"/>
+            <a:ext cx="11094415" cy="780000"/>
+          </a:xfrm>
+          <a:prstGeom prst="roundRect">
+            <a:avLst>
+              <a:gd name="adj" fmla="val 6557"/>
+            </a:avLst>
+          </a:prstGeom>
+          <a:solidFill>
+            <a:srgbClr val="F1F5F8"/>
+          </a:solidFill>
+          <a:ln w="12700">
+            <a:solidFill>
+              <a:srgbClr val="DCE6EC"/>
+            </a:solidFill>
+            <a:prstDash val="solid"/>
+          </a:ln>
+          <a:effectLst>
+            <a:outerShdw blurRad="76200" dist="25400" dir="5400000" algn="bl" rotWithShape="0">
+              <a:srgbClr val="9AA7AF">
+                <a:alpha val="25000"/>
+              </a:srgbClr>
+            </a:outerShdw>
+          </a:effectLst>
+        </p:spPr>
+        <p:txBody>
+          <a:bodyPr/>
+          <a:lstStyle/>
+          <a:p>
+            <a:endParaRPr lang="it-IT" noProof="0" dirty="0"/>
+          </a:p>
+        </p:txBody>
+      </p:sp>
+      <p:sp>
+        <p:nvSpPr>
+          <p:cNvPr id="16" name="Shape 3"/>
+          <p:cNvSpPr/>
+          <p:nvPr/>
+        </p:nvSpPr>
+        <p:spPr>
+          <a:xfrm>
+            <a:off x="548640" y="4460000"/>
+            <a:ext cx="128016" cy="780000"/>
+          </a:xfrm>
+          <a:prstGeom prst="roundRect">
+            <a:avLst/>
+          </a:prstGeom>
+          <a:solidFill>
+            <a:srgbClr val="1C7293"/>
+          </a:solidFill>
+          <a:ln/>
+        </p:spPr>
+        <p:txBody>
+          <a:bodyPr/>
+          <a:lstStyle/>
+          <a:p>
+            <a:endParaRPr lang="it-IT" noProof="0" dirty="0"/>
+          </a:p>
+        </p:txBody>
+      </p:sp>
+      <p:sp>
+        <p:nvSpPr>
+          <p:cNvPr id="17" name="Text 4"/>
+          <p:cNvSpPr/>
+          <p:nvPr/>
+        </p:nvSpPr>
+        <p:spPr>
+          <a:xfrm>
+            <a:off x="914400" y="4520000"/>
+            <a:ext cx="3291840" cy="660000"/>
+          </a:xfrm>
+          <a:prstGeom prst="rect">
+            <a:avLst/>
+          </a:prstGeom>
+          <a:noFill/>
+          <a:ln/>
+        </p:spPr>
+        <p:txBody>
+          <a:bodyPr wrap="square" lIns="0" tIns="0" rIns="0" bIns="0" rtlCol="0" anchor="ctr"/>
+          <a:lstStyle/>
+          <a:p>
+            <a:pPr marL="0" indent="0">
+              <a:lnSpc>
+                <a:spcPct val="110000"/>
+              </a:lnSpc>
+              <a:buNone/>
+            </a:pPr>
+            <a:r>
+              <a:rPr lang="it-IT" sz="1500" b="1" noProof="0" dirty="0">
+                <a:solidFill>
+                  <a:srgbClr val="0B3D59"/>
+                </a:solidFill>
+                <a:latin typeface="Calibri" pitchFamily="34" charset="0"/>
+                <a:ea typeface="Calibri" pitchFamily="34" charset="-122"/>
+                <a:cs typeface="Calibri" pitchFamily="34" charset="-120"/>
+              </a:rPr>
+              <a:t>RETE</a:t>
+            </a:r>
+            <a:endParaRPr lang="it-IT" sz="1500" noProof="0" dirty="0"/>
+          </a:p>
+        </p:txBody>
+      </p:sp>
+      <p:sp>
+        <p:nvSpPr>
+          <p:cNvPr id="18" name="Text 5"/>
+          <p:cNvSpPr/>
+          <p:nvPr/>
+        </p:nvSpPr>
+        <p:spPr>
+          <a:xfrm>
+            <a:off x="4389120" y="4520000"/>
+            <a:ext cx="6979615" cy="660000"/>
+          </a:xfrm>
+          <a:prstGeom prst="rect">
+            <a:avLst/>
+          </a:prstGeom>
+          <a:noFill/>
+          <a:ln/>
+        </p:spPr>
+        <p:txBody>
+          <a:bodyPr wrap="square" lIns="0" tIns="0" rIns="0" bIns="0" rtlCol="0" anchor="ctr"/>
+          <a:lstStyle/>
+          <a:p>
+            <a:pPr>
+              <a:lnSpc>
+                <a:spcPct val="120000"/>
+              </a:lnSpc>
+            </a:pPr>
+            <a:r>
+              <a:rPr lang="it-IT" sz="1200" dirty="0">
+                <a:solidFill>
+                  <a:srgbClr val="20303D"/>
+                </a:solidFill>
+                <a:latin typeface="Courier New" pitchFamily="34" charset="0"/>
+                <a:cs typeface="Courier New" pitchFamily="34" charset="-120"/>
+              </a:rPr>
+              <a:t>Assorbe il grosso: importa energia nell'89% delle ore dell'anno.</a:t>
+            </a:r>
+          </a:p>
+        </p:txBody>
+      </p:sp>
+      <p:sp>
+        <p:nvSpPr>
+          <p:cNvPr id="19" name="Shape 2"/>
+          <p:cNvSpPr/>
+          <p:nvPr/>
+        </p:nvSpPr>
+        <p:spPr>
+          <a:xfrm>
+            <a:off x="548639" y="5370000"/>
+            <a:ext cx="11094415" cy="780000"/>
+          </a:xfrm>
+          <a:prstGeom prst="roundRect">
+            <a:avLst>
+              <a:gd name="adj" fmla="val 6557"/>
+            </a:avLst>
+          </a:prstGeom>
+          <a:solidFill>
+            <a:srgbClr val="F1F5F8"/>
+          </a:solidFill>
+          <a:ln w="12700">
+            <a:solidFill>
+              <a:srgbClr val="DCE6EC"/>
+            </a:solidFill>
+            <a:prstDash val="solid"/>
+          </a:ln>
+          <a:effectLst>
+            <a:outerShdw blurRad="76200" dist="25400" dir="5400000" algn="bl" rotWithShape="0">
+              <a:srgbClr val="9AA7AF">
+                <a:alpha val="25000"/>
+              </a:srgbClr>
+            </a:outerShdw>
+          </a:effectLst>
+        </p:spPr>
+        <p:txBody>
+          <a:bodyPr/>
+          <a:lstStyle/>
+          <a:p>
+            <a:endParaRPr lang="it-IT" noProof="0" dirty="0"/>
+          </a:p>
+        </p:txBody>
+      </p:sp>
+      <p:sp>
+        <p:nvSpPr>
+          <p:cNvPr id="20" name="Shape 3"/>
+          <p:cNvSpPr/>
+          <p:nvPr/>
+        </p:nvSpPr>
+        <p:spPr>
+          <a:xfrm>
+            <a:off x="548640" y="5370000"/>
+            <a:ext cx="128016" cy="780000"/>
+          </a:xfrm>
+          <a:prstGeom prst="roundRect">
+            <a:avLst/>
+          </a:prstGeom>
+          <a:solidFill>
+            <a:srgbClr val="C98A00"/>
+          </a:solidFill>
+          <a:ln/>
+        </p:spPr>
+        <p:txBody>
+          <a:bodyPr/>
+          <a:lstStyle/>
+          <a:p>
+            <a:endParaRPr lang="it-IT" noProof="0" dirty="0"/>
+          </a:p>
+        </p:txBody>
+      </p:sp>
+      <p:sp>
+        <p:nvSpPr>
+          <p:cNvPr id="21" name="Text 4"/>
+          <p:cNvSpPr/>
+          <p:nvPr/>
+        </p:nvSpPr>
+        <p:spPr>
+          <a:xfrm>
+            <a:off x="914400" y="5430000"/>
+            <a:ext cx="3291840" cy="660000"/>
+          </a:xfrm>
+          <a:prstGeom prst="rect">
+            <a:avLst/>
+          </a:prstGeom>
+          <a:noFill/>
+          <a:ln/>
+        </p:spPr>
+        <p:txBody>
+          <a:bodyPr wrap="square" lIns="0" tIns="0" rIns="0" bIns="0" rtlCol="0" anchor="ctr"/>
+          <a:lstStyle/>
+          <a:p>
+            <a:pPr marL="0" indent="0">
+              <a:lnSpc>
+                <a:spcPct val="110000"/>
+              </a:lnSpc>
+              <a:buNone/>
+            </a:pPr>
+            <a:r>
+              <a:rPr lang="it-IT" sz="1500" b="1" noProof="0" dirty="0">
+                <a:solidFill>
+                  <a:srgbClr val="0B3D59"/>
+                </a:solidFill>
+                <a:latin typeface="Calibri" pitchFamily="34" charset="0"/>
+                <a:ea typeface="Calibri" pitchFamily="34" charset="-122"/>
+                <a:cs typeface="Calibri" pitchFamily="34" charset="-120"/>
+              </a:rPr>
+              <a:t>EDIFICIO</a:t>
+            </a:r>
+            <a:endParaRPr lang="it-IT" sz="1500" noProof="0" dirty="0"/>
+          </a:p>
+        </p:txBody>
+      </p:sp>
+      <p:sp>
+        <p:nvSpPr>
+          <p:cNvPr id="22" name="Text 5"/>
+          <p:cNvSpPr/>
+          <p:nvPr/>
+        </p:nvSpPr>
+        <p:spPr>
+          <a:xfrm>
+            <a:off x="4389120" y="5430000"/>
+            <a:ext cx="6979615" cy="660000"/>
+          </a:xfrm>
+          <a:prstGeom prst="rect">
+            <a:avLst/>
+          </a:prstGeom>
+          <a:noFill/>
+          <a:ln/>
+        </p:spPr>
+        <p:txBody>
+          <a:bodyPr wrap="square" lIns="0" tIns="0" rIns="0" bIns="0" rtlCol="0" anchor="ctr"/>
+          <a:lstStyle/>
+          <a:p>
+            <a:pPr>
+              <a:lnSpc>
+                <a:spcPct val="120000"/>
+              </a:lnSpc>
+            </a:pPr>
+            <a:r>
+              <a:rPr lang="it-IT" sz="1200" dirty="0">
+                <a:solidFill>
+                  <a:srgbClr val="20303D"/>
+                </a:solidFill>
+                <a:latin typeface="Courier New" pitchFamily="34" charset="0"/>
+                <a:cs typeface="Courier New" pitchFamily="34" charset="-120"/>
+              </a:rPr>
+              <a:t>Sempre soddisfatto: il carico non è mai in discussione.</a:t>
+            </a:r>
+          </a:p>
+        </p:txBody>
+      </p:sp>
+    </p:spTree>
+  </p:cSld>
+  <p:clrMapOvr>
+    <a:masterClrMapping/>
+  </p:clrMapOvr>
+</p:sld>
+</file>
+
+<file path=ppt/slides/slide22.xml><?xml version="1.0" encoding="utf-8"?>
 <p:sld xmlns:a="http://schemas.openxmlformats.org/drawingml/2006/main" xmlns:r="http://schemas.openxmlformats.org/officeDocument/2006/relationships" xmlns:p="http://schemas.openxmlformats.org/presentationml/2006/main">
   <p:cSld name="Slide 20">
     <p:bg>
